--- a/reports/肉酒場然_事業計画書_20260606.pptx
+++ b/reports/肉酒場然_事業計画書_20260606.pptx
@@ -5854,9 +5854,9 @@
                 </a:solidFill>
               </a:rPr>
               <a:t>然の発酵だし×立ち食い蕎麦の
-小型FC業態。5〜10坪・1人OP。
-低投資・昼の高回転モデルで
-月商150万円を設計。</a:t>
+FC業態。2人OP・客単価1,500円。
+月商400万円・高回転モデルで
+FC加盟者の収益性を高く設計。</a:t>
             </a:r>
           </a:p>
         </p:txBody>
@@ -5933,7 +5933,7 @@
                   <a:srgbClr val="C8963C"/>
                 </a:solidFill>
               </a:rPr>
-              <a:t>7年目目標：年商 12億円（約80店舗）</a:t>
+              <a:t>7年目目標：年商 12億円（約25店舗）</a:t>
             </a:r>
           </a:p>
         </p:txBody>
@@ -5967,7 +5967,7 @@
                   <a:srgbClr val="8A7A6A"/>
                 </a:solidFill>
               </a:rPr>
-              <a:t>5〜10坪 / 1人OP / 初期投資500万以下</a:t>
+              <a:t>2人OP / 月商400万 / 客単価1,500円</a:t>
             </a:r>
           </a:p>
         </p:txBody>
